--- a/Reports/SVDPoster.pptx
+++ b/Reports/SVDPoster.pptx
@@ -206,7 +206,7 @@
           <a:p>
             <a:fld id="{DCBC21A3-ECD8-1A4C-BB32-86B42EB3A6FA}" type="datetimeFigureOut">
               <a:rPr lang="en-US" smtClean="0"/>
-              <a:t>4/28/22</a:t>
+              <a:t>5/1/22</a:t>
             </a:fld>
             <a:endParaRPr lang="en-US"/>
           </a:p>
@@ -686,7 +686,7 @@
           <a:p>
             <a:fld id="{6A4B53A7-3209-46A6-9454-F38EAC8F11E7}" type="datetimeFigureOut">
               <a:rPr lang="en-US" smtClean="0"/>
-              <a:t>4/28/22</a:t>
+              <a:t>5/1/22</a:t>
             </a:fld>
             <a:endParaRPr lang="en-US"/>
           </a:p>
@@ -854,7 +854,7 @@
           <a:p>
             <a:fld id="{6A4B53A7-3209-46A6-9454-F38EAC8F11E7}" type="datetimeFigureOut">
               <a:rPr lang="en-US" smtClean="0"/>
-              <a:t>4/28/22</a:t>
+              <a:t>5/1/22</a:t>
             </a:fld>
             <a:endParaRPr lang="en-US"/>
           </a:p>
@@ -1032,7 +1032,7 @@
           <a:p>
             <a:fld id="{6A4B53A7-3209-46A6-9454-F38EAC8F11E7}" type="datetimeFigureOut">
               <a:rPr lang="en-US" smtClean="0"/>
-              <a:t>4/28/22</a:t>
+              <a:t>5/1/22</a:t>
             </a:fld>
             <a:endParaRPr lang="en-US"/>
           </a:p>
@@ -1200,7 +1200,7 @@
           <a:p>
             <a:fld id="{6A4B53A7-3209-46A6-9454-F38EAC8F11E7}" type="datetimeFigureOut">
               <a:rPr lang="en-US" smtClean="0"/>
-              <a:t>4/28/22</a:t>
+              <a:t>5/1/22</a:t>
             </a:fld>
             <a:endParaRPr lang="en-US"/>
           </a:p>
@@ -1443,7 +1443,7 @@
           <a:p>
             <a:fld id="{6A4B53A7-3209-46A6-9454-F38EAC8F11E7}" type="datetimeFigureOut">
               <a:rPr lang="en-US" smtClean="0"/>
-              <a:t>4/28/22</a:t>
+              <a:t>5/1/22</a:t>
             </a:fld>
             <a:endParaRPr lang="en-US"/>
           </a:p>
@@ -1672,7 +1672,7 @@
           <a:p>
             <a:fld id="{6A4B53A7-3209-46A6-9454-F38EAC8F11E7}" type="datetimeFigureOut">
               <a:rPr lang="en-US" smtClean="0"/>
-              <a:t>4/28/22</a:t>
+              <a:t>5/1/22</a:t>
             </a:fld>
             <a:endParaRPr lang="en-US"/>
           </a:p>
@@ -2036,7 +2036,7 @@
           <a:p>
             <a:fld id="{6A4B53A7-3209-46A6-9454-F38EAC8F11E7}" type="datetimeFigureOut">
               <a:rPr lang="en-US" smtClean="0"/>
-              <a:t>4/28/22</a:t>
+              <a:t>5/1/22</a:t>
             </a:fld>
             <a:endParaRPr lang="en-US"/>
           </a:p>
@@ -2153,7 +2153,7 @@
           <a:p>
             <a:fld id="{6A4B53A7-3209-46A6-9454-F38EAC8F11E7}" type="datetimeFigureOut">
               <a:rPr lang="en-US" smtClean="0"/>
-              <a:t>4/28/22</a:t>
+              <a:t>5/1/22</a:t>
             </a:fld>
             <a:endParaRPr lang="en-US"/>
           </a:p>
@@ -2248,7 +2248,7 @@
           <a:p>
             <a:fld id="{6A4B53A7-3209-46A6-9454-F38EAC8F11E7}" type="datetimeFigureOut">
               <a:rPr lang="en-US" smtClean="0"/>
-              <a:t>4/28/22</a:t>
+              <a:t>5/1/22</a:t>
             </a:fld>
             <a:endParaRPr lang="en-US"/>
           </a:p>
@@ -2523,7 +2523,7 @@
           <a:p>
             <a:fld id="{6A4B53A7-3209-46A6-9454-F38EAC8F11E7}" type="datetimeFigureOut">
               <a:rPr lang="en-US" smtClean="0"/>
-              <a:t>4/28/22</a:t>
+              <a:t>5/1/22</a:t>
             </a:fld>
             <a:endParaRPr lang="en-US"/>
           </a:p>
@@ -2778,7 +2778,7 @@
           <a:p>
             <a:fld id="{6A4B53A7-3209-46A6-9454-F38EAC8F11E7}" type="datetimeFigureOut">
               <a:rPr lang="en-US" smtClean="0"/>
-              <a:t>4/28/22</a:t>
+              <a:t>5/1/22</a:t>
             </a:fld>
             <a:endParaRPr lang="en-US"/>
           </a:p>
@@ -2990,7 +2990,7 @@
             <a:fld id="{6A4B53A7-3209-46A6-9454-F38EAC8F11E7}" type="datetimeFigureOut">
               <a:rPr lang="en-US" smtClean="0"/>
               <a:pPr/>
-              <a:t>4/28/22</a:t>
+              <a:t>5/1/22</a:t>
             </a:fld>
             <a:endParaRPr lang="en-US"/>
           </a:p>
@@ -6203,19 +6203,19 @@
               </a:spcAft>
             </a:pPr>
             <a:r>
-              <a:rPr lang="en-US" sz="2800">
+              <a:rPr lang="en-US" sz="2800" dirty="0">
                 <a:latin typeface="Avenir Book"/>
               </a:rPr>
               <a:t>Technologies and packages used: Python using the Anaconda distribution, SciPy, Scikit-Learn, </a:t>
             </a:r>
             <a:r>
-              <a:rPr lang="en-US" sz="2800" err="1">
+              <a:rPr lang="en-US" sz="2800" dirty="0" err="1">
                 <a:latin typeface="Avenir Book"/>
               </a:rPr>
               <a:t>Numpy</a:t>
             </a:r>
             <a:r>
-              <a:rPr lang="en-US" sz="2800">
+              <a:rPr lang="en-US" sz="2800" dirty="0">
                 <a:latin typeface="Avenir Book"/>
               </a:rPr>
               <a:t>, matplotlib, and h5py.</a:t>
@@ -6228,10 +6228,16 @@
               </a:spcAft>
             </a:pPr>
             <a:r>
+              <a:rPr lang="en-US" sz="2800" dirty="0">
+                <a:latin typeface="Avenir Book"/>
+              </a:rPr>
+              <a:t>We applied the classification model, Linear Least Squares, to achieve an accuracy of 94.52% on the prediction of digit values from the testing dataset. </a:t>
+            </a:r>
+            <a:r>
               <a:rPr lang="en-US" sz="2800">
                 <a:latin typeface="Avenir Book"/>
               </a:rPr>
-              <a:t>We applied the classification model, Linear Least Squares, to achieve an accuracy of 94.52% on the prediction of digit values from the testing dataset. Thus, out of 2007 test values, 1,897 were classified correctly.</a:t>
+              <a:t>Thus, out of 2007 test values, 1897 were classified correctly.</a:t>
             </a:r>
             <a:endParaRPr lang="en-US" sz="2800">
               <a:solidFill>
@@ -6879,7 +6885,7 @@
               </a:spcAft>
             </a:pPr>
             <a:r>
-              <a:rPr lang="en-US" sz="2800">
+              <a:rPr lang="en-US" sz="2800" dirty="0">
                 <a:latin typeface="Avenir Book"/>
               </a:rPr>
               <a:t>The individual success rate of each digit differs in accordance with the complexity of the digit, along with the cleanliness of the rank-12 matrix approximations. The similarity of a digit’s characteristics to another digit also impacted its success rate.</a:t>
@@ -6892,7 +6898,7 @@
               </a:spcAft>
             </a:pPr>
             <a:r>
-              <a:rPr lang="en-US" sz="2800">
+              <a:rPr lang="en-US" sz="2800" dirty="0">
                 <a:latin typeface="Avenir Book"/>
               </a:rPr>
               <a:t>Digit 0, while having the largest population in the dataset, also performed the best with an accuracy of 98.60%. However, digit 3 had the lowest accuracy of 86.70%.</a:t>
@@ -6904,7 +6910,7 @@
                 <a:spcPts val="1800"/>
               </a:spcAft>
             </a:pPr>
-            <a:endParaRPr lang="en-US" sz="2800">
+            <a:endParaRPr lang="en-US" sz="2800" dirty="0">
               <a:latin typeface="Avenir Book"/>
             </a:endParaRPr>
           </a:p>
@@ -6914,7 +6920,7 @@
                 <a:spcPts val="1800"/>
               </a:spcAft>
             </a:pPr>
-            <a:endParaRPr lang="en-US" sz="2800">
+            <a:endParaRPr lang="en-US" sz="2800" dirty="0">
               <a:latin typeface="Avenir Book"/>
             </a:endParaRPr>
           </a:p>
@@ -6924,7 +6930,7 @@
                 <a:spcPts val="1800"/>
               </a:spcAft>
             </a:pPr>
-            <a:endParaRPr lang="en-US" sz="2800">
+            <a:endParaRPr lang="en-US" sz="2800" dirty="0">
               <a:latin typeface="Avenir Book"/>
             </a:endParaRPr>
           </a:p>
@@ -6934,7 +6940,7 @@
                 <a:spcPts val="1800"/>
               </a:spcAft>
             </a:pPr>
-            <a:endParaRPr lang="en-US" sz="2800">
+            <a:endParaRPr lang="en-US" sz="2800" dirty="0">
               <a:latin typeface="Avenir Book"/>
             </a:endParaRPr>
           </a:p>
